--- a/AI_Usecases/AI-1-Evolution_TraditionalAI_vs_GenAI.pptx
+++ b/AI_Usecases/AI-1-Evolution_TraditionalAI_vs_GenAI.pptx
@@ -5,10 +5,10 @@
     <p:sldMasterId id="2147483648" r:id="rId1"/>
   </p:sldMasterIdLst>
   <p:notesMasterIdLst>
-    <p:notesMasterId r:id="rId17"/>
+    <p:notesMasterId r:id="rId18"/>
   </p:notesMasterIdLst>
   <p:handoutMasterIdLst>
-    <p:handoutMasterId r:id="rId18"/>
+    <p:handoutMasterId r:id="rId19"/>
   </p:handoutMasterIdLst>
   <p:sldIdLst>
     <p:sldId id="276" r:id="rId2"/>
@@ -18,14 +18,15 @@
     <p:sldId id="279" r:id="rId6"/>
     <p:sldId id="280" r:id="rId7"/>
     <p:sldId id="281" r:id="rId8"/>
-    <p:sldId id="282" r:id="rId9"/>
-    <p:sldId id="283" r:id="rId10"/>
-    <p:sldId id="284" r:id="rId11"/>
-    <p:sldId id="289" r:id="rId12"/>
-    <p:sldId id="288" r:id="rId13"/>
-    <p:sldId id="290" r:id="rId14"/>
-    <p:sldId id="287" r:id="rId15"/>
-    <p:sldId id="277" r:id="rId16"/>
+    <p:sldId id="291" r:id="rId9"/>
+    <p:sldId id="282" r:id="rId10"/>
+    <p:sldId id="283" r:id="rId11"/>
+    <p:sldId id="284" r:id="rId12"/>
+    <p:sldId id="289" r:id="rId13"/>
+    <p:sldId id="288" r:id="rId14"/>
+    <p:sldId id="290" r:id="rId15"/>
+    <p:sldId id="287" r:id="rId16"/>
+    <p:sldId id="277" r:id="rId17"/>
   </p:sldIdLst>
   <p:sldSz cx="12192000" cy="6858000"/>
   <p:notesSz cx="6858000" cy="9144000"/>
@@ -229,7 +230,7 @@
           <a:p>
             <a:fld id="{7BAEECA8-D063-486F-AE31-5020270C1449}" type="datetimeFigureOut">
               <a:rPr lang="en-US" smtClean="0"/>
-              <a:t>7/26/2026</a:t>
+              <a:t>8/2/2026</a:t>
             </a:fld>
             <a:endParaRPr lang="en-US"/>
           </a:p>
@@ -1238,7 +1239,7 @@
           <a:p>
             <a:fld id="{CB233BD1-3BA8-448D-9D08-7846095EA517}" type="datetimeFigureOut">
               <a:rPr lang="en-US" smtClean="0"/>
-              <a:t>7/26/2026</a:t>
+              <a:t>8/2/2026</a:t>
             </a:fld>
             <a:endParaRPr lang="en-US"/>
           </a:p>
@@ -1652,7 +1653,7 @@
           <a:p>
             <a:fld id="{6383FAE1-13DE-4511-8C1B-C8AFB720664C}" type="datetimeFigureOut">
               <a:rPr lang="en-US" smtClean="0"/>
-              <a:t>7/26/2026</a:t>
+              <a:t>8/2/2026</a:t>
             </a:fld>
             <a:endParaRPr lang="en-US"/>
           </a:p>
@@ -1850,7 +1851,7 @@
           <a:p>
             <a:fld id="{6383FAE1-13DE-4511-8C1B-C8AFB720664C}" type="datetimeFigureOut">
               <a:rPr lang="en-US" smtClean="0"/>
-              <a:t>7/26/2026</a:t>
+              <a:t>8/2/2026</a:t>
             </a:fld>
             <a:endParaRPr lang="en-US"/>
           </a:p>
@@ -2058,7 +2059,7 @@
           <a:p>
             <a:fld id="{6383FAE1-13DE-4511-8C1B-C8AFB720664C}" type="datetimeFigureOut">
               <a:rPr lang="en-US" smtClean="0"/>
-              <a:t>7/26/2026</a:t>
+              <a:t>8/2/2026</a:t>
             </a:fld>
             <a:endParaRPr lang="en-US"/>
           </a:p>
@@ -2256,7 +2257,7 @@
           <a:p>
             <a:fld id="{6383FAE1-13DE-4511-8C1B-C8AFB720664C}" type="datetimeFigureOut">
               <a:rPr lang="en-US" smtClean="0"/>
-              <a:t>7/26/2026</a:t>
+              <a:t>8/2/2026</a:t>
             </a:fld>
             <a:endParaRPr lang="en-US"/>
           </a:p>
@@ -2531,7 +2532,7 @@
           <a:p>
             <a:fld id="{6383FAE1-13DE-4511-8C1B-C8AFB720664C}" type="datetimeFigureOut">
               <a:rPr lang="en-US" smtClean="0"/>
-              <a:t>7/26/2026</a:t>
+              <a:t>8/2/2026</a:t>
             </a:fld>
             <a:endParaRPr lang="en-US"/>
           </a:p>
@@ -2796,7 +2797,7 @@
           <a:p>
             <a:fld id="{6383FAE1-13DE-4511-8C1B-C8AFB720664C}" type="datetimeFigureOut">
               <a:rPr lang="en-US" smtClean="0"/>
-              <a:t>7/26/2026</a:t>
+              <a:t>8/2/2026</a:t>
             </a:fld>
             <a:endParaRPr lang="en-US"/>
           </a:p>
@@ -3208,7 +3209,7 @@
           <a:p>
             <a:fld id="{6383FAE1-13DE-4511-8C1B-C8AFB720664C}" type="datetimeFigureOut">
               <a:rPr lang="en-US" smtClean="0"/>
-              <a:t>7/26/2026</a:t>
+              <a:t>8/2/2026</a:t>
             </a:fld>
             <a:endParaRPr lang="en-US"/>
           </a:p>
@@ -3349,7 +3350,7 @@
           <a:p>
             <a:fld id="{6383FAE1-13DE-4511-8C1B-C8AFB720664C}" type="datetimeFigureOut">
               <a:rPr lang="en-US" smtClean="0"/>
-              <a:t>7/26/2026</a:t>
+              <a:t>8/2/2026</a:t>
             </a:fld>
             <a:endParaRPr lang="en-US"/>
           </a:p>
@@ -3462,7 +3463,7 @@
           <a:p>
             <a:fld id="{6383FAE1-13DE-4511-8C1B-C8AFB720664C}" type="datetimeFigureOut">
               <a:rPr lang="en-US" smtClean="0"/>
-              <a:t>7/26/2026</a:t>
+              <a:t>8/2/2026</a:t>
             </a:fld>
             <a:endParaRPr lang="en-US"/>
           </a:p>
@@ -3773,7 +3774,7 @@
           <a:p>
             <a:fld id="{6383FAE1-13DE-4511-8C1B-C8AFB720664C}" type="datetimeFigureOut">
               <a:rPr lang="en-US" smtClean="0"/>
-              <a:t>7/26/2026</a:t>
+              <a:t>8/2/2026</a:t>
             </a:fld>
             <a:endParaRPr lang="en-US"/>
           </a:p>
@@ -4064,7 +4065,7 @@
           <a:p>
             <a:fld id="{6383FAE1-13DE-4511-8C1B-C8AFB720664C}" type="datetimeFigureOut">
               <a:rPr lang="en-US" smtClean="0"/>
-              <a:t>7/26/2026</a:t>
+              <a:t>8/2/2026</a:t>
             </a:fld>
             <a:endParaRPr lang="en-US"/>
           </a:p>
@@ -4308,7 +4309,7 @@
           <a:p>
             <a:fld id="{6383FAE1-13DE-4511-8C1B-C8AFB720664C}" type="datetimeFigureOut">
               <a:rPr lang="en-US" smtClean="0"/>
-              <a:t>7/26/2026</a:t>
+              <a:t>8/2/2026</a:t>
             </a:fld>
             <a:endParaRPr lang="en-US"/>
           </a:p>
@@ -4954,6 +4955,270 @@
         <p:cNvPr id="1" name="">
           <a:extLst>
             <a:ext uri="{FF2B5EF4-FFF2-40B4-BE49-F238E27FC236}">
+              <a16:creationId xmlns:a16="http://schemas.microsoft.com/office/drawing/2014/main" id="{39D7987C-E997-B003-4F1A-0C0C8FBA1DC6}"/>
+            </a:ext>
+          </a:extLst>
+        </p:cNvPr>
+        <p:cNvGrpSpPr/>
+        <p:nvPr/>
+      </p:nvGrpSpPr>
+      <p:grpSpPr>
+        <a:xfrm>
+          <a:off x="0" y="0"/>
+          <a:ext cx="0" cy="0"/>
+          <a:chOff x="0" y="0"/>
+          <a:chExt cx="0" cy="0"/>
+        </a:xfrm>
+      </p:grpSpPr>
+      <p:sp>
+        <p:nvSpPr>
+          <p:cNvPr id="3" name="TextBox 2">
+            <a:extLst>
+              <a:ext uri="{FF2B5EF4-FFF2-40B4-BE49-F238E27FC236}">
+                <a16:creationId xmlns:a16="http://schemas.microsoft.com/office/drawing/2014/main" id="{40BC7108-C77B-96A6-B0A4-665394E2C08F}"/>
+              </a:ext>
+            </a:extLst>
+          </p:cNvPr>
+          <p:cNvSpPr txBox="1"/>
+          <p:nvPr/>
+        </p:nvSpPr>
+        <p:spPr>
+          <a:xfrm>
+            <a:off x="0" y="1721443"/>
+            <a:ext cx="11960352" cy="3785652"/>
+          </a:xfrm>
+          <a:prstGeom prst="rect">
+            <a:avLst/>
+          </a:prstGeom>
+          <a:noFill/>
+        </p:spPr>
+        <p:txBody>
+          <a:bodyPr wrap="square">
+            <a:spAutoFit/>
+          </a:bodyPr>
+          <a:lstStyle/>
+          <a:p>
+            <a:r>
+              <a:rPr lang="en-US" sz="2400" b="1" dirty="0">
+                <a:solidFill>
+                  <a:schemeClr val="accent6">
+                    <a:lumMod val="60000"/>
+                    <a:lumOff val="40000"/>
+                  </a:schemeClr>
+                </a:solidFill>
+              </a:rPr>
+              <a:t>4️. Generative AI  (2020s–Future) </a:t>
+            </a:r>
+          </a:p>
+          <a:p>
+            <a:endParaRPr lang="en-US" sz="2400" dirty="0">
+              <a:solidFill>
+                <a:schemeClr val="accent6">
+                  <a:lumMod val="60000"/>
+                  <a:lumOff val="40000"/>
+                </a:schemeClr>
+              </a:solidFill>
+            </a:endParaRPr>
+          </a:p>
+          <a:p>
+            <a:r>
+              <a:rPr lang="en-US" sz="2400" dirty="0">
+                <a:solidFill>
+                  <a:schemeClr val="accent6">
+                    <a:lumMod val="60000"/>
+                    <a:lumOff val="40000"/>
+                  </a:schemeClr>
+                </a:solidFill>
+              </a:rPr>
+              <a:t>“Now I can </a:t>
+            </a:r>
+            <a:r>
+              <a:rPr lang="en-US" sz="2400" b="1" dirty="0">
+                <a:solidFill>
+                  <a:schemeClr val="accent6">
+                    <a:lumMod val="60000"/>
+                    <a:lumOff val="40000"/>
+                  </a:schemeClr>
+                </a:solidFill>
+              </a:rPr>
+              <a:t>learn, imagine, write, and make up </a:t>
+            </a:r>
+            <a:r>
+              <a:rPr lang="en-US" sz="2400" dirty="0">
+                <a:solidFill>
+                  <a:schemeClr val="accent6">
+                    <a:lumMod val="60000"/>
+                    <a:lumOff val="40000"/>
+                  </a:schemeClr>
+                </a:solidFill>
+              </a:rPr>
+              <a:t>new things.”</a:t>
+            </a:r>
+          </a:p>
+          <a:p>
+            <a:endParaRPr lang="en-US" sz="2400" dirty="0">
+              <a:solidFill>
+                <a:schemeClr val="accent6">
+                  <a:lumMod val="60000"/>
+                  <a:lumOff val="40000"/>
+                </a:schemeClr>
+              </a:solidFill>
+            </a:endParaRPr>
+          </a:p>
+          <a:p>
+            <a:r>
+              <a:rPr lang="en-US" sz="2400" dirty="0">
+                <a:solidFill>
+                  <a:schemeClr val="accent6">
+                    <a:lumMod val="60000"/>
+                    <a:lumOff val="40000"/>
+                  </a:schemeClr>
+                </a:solidFill>
+              </a:rPr>
+              <a:t>These models generate brand new content: text, art, code, music—even </a:t>
+            </a:r>
+            <a:r>
+              <a:rPr lang="en-US" sz="2400" b="1" dirty="0">
+                <a:solidFill>
+                  <a:schemeClr val="accent6">
+                    <a:lumMod val="60000"/>
+                    <a:lumOff val="40000"/>
+                  </a:schemeClr>
+                </a:solidFill>
+              </a:rPr>
+              <a:t>deepfakes</a:t>
+            </a:r>
+            <a:r>
+              <a:rPr lang="en-US" sz="2400" dirty="0">
+                <a:solidFill>
+                  <a:schemeClr val="accent6">
+                    <a:lumMod val="60000"/>
+                    <a:lumOff val="40000"/>
+                  </a:schemeClr>
+                </a:solidFill>
+              </a:rPr>
+              <a:t>.</a:t>
+            </a:r>
+          </a:p>
+          <a:p>
+            <a:r>
+              <a:rPr lang="en-US" sz="2400" dirty="0">
+                <a:solidFill>
+                  <a:schemeClr val="accent6">
+                    <a:lumMod val="60000"/>
+                    <a:lumOff val="40000"/>
+                  </a:schemeClr>
+                </a:solidFill>
+              </a:rPr>
+              <a:t> </a:t>
+            </a:r>
+          </a:p>
+          <a:p>
+            <a:r>
+              <a:rPr lang="en-US" sz="2400" b="1" dirty="0">
+                <a:solidFill>
+                  <a:schemeClr val="accent6">
+                    <a:lumMod val="60000"/>
+                    <a:lumOff val="40000"/>
+                  </a:schemeClr>
+                </a:solidFill>
+              </a:rPr>
+              <a:t>Example:</a:t>
+            </a:r>
+            <a:endParaRPr lang="en-US" sz="2400" dirty="0">
+              <a:solidFill>
+                <a:schemeClr val="accent6">
+                  <a:lumMod val="60000"/>
+                  <a:lumOff val="40000"/>
+                </a:schemeClr>
+              </a:solidFill>
+            </a:endParaRPr>
+          </a:p>
+          <a:p>
+            <a:pPr marL="342900" lvl="0" indent="-342900">
+              <a:buFont typeface="Arial" panose="020B0604020202020204" pitchFamily="34" charset="0"/>
+              <a:buChar char="•"/>
+            </a:pPr>
+            <a:r>
+              <a:rPr lang="en-US" sz="2400" dirty="0">
+                <a:solidFill>
+                  <a:schemeClr val="accent6">
+                    <a:lumMod val="60000"/>
+                    <a:lumOff val="40000"/>
+                  </a:schemeClr>
+                </a:solidFill>
+              </a:rPr>
+              <a:t>ChatGPT writing stories</a:t>
+            </a:r>
+          </a:p>
+          <a:p>
+            <a:pPr marL="342900" lvl="0" indent="-342900">
+              <a:buFont typeface="Arial" panose="020B0604020202020204" pitchFamily="34" charset="0"/>
+              <a:buChar char="•"/>
+            </a:pPr>
+            <a:r>
+              <a:rPr lang="en-US" sz="2400" dirty="0">
+                <a:solidFill>
+                  <a:schemeClr val="accent6">
+                    <a:lumMod val="60000"/>
+                    <a:lumOff val="40000"/>
+                  </a:schemeClr>
+                </a:solidFill>
+              </a:rPr>
+              <a:t>DALL·E creating images from words</a:t>
+            </a:r>
+          </a:p>
+          <a:p>
+            <a:pPr marL="342900" lvl="0" indent="-342900">
+              <a:buFont typeface="Arial" panose="020B0604020202020204" pitchFamily="34" charset="0"/>
+              <a:buChar char="•"/>
+            </a:pPr>
+            <a:r>
+              <a:rPr lang="en-US" sz="2400" dirty="0" err="1">
+                <a:solidFill>
+                  <a:schemeClr val="accent6">
+                    <a:lumMod val="60000"/>
+                    <a:lumOff val="40000"/>
+                  </a:schemeClr>
+                </a:solidFill>
+              </a:rPr>
+              <a:t>MusicLM</a:t>
+            </a:r>
+            <a:r>
+              <a:rPr lang="en-US" sz="2400" dirty="0">
+                <a:solidFill>
+                  <a:schemeClr val="accent6">
+                    <a:lumMod val="60000"/>
+                    <a:lumOff val="40000"/>
+                  </a:schemeClr>
+                </a:solidFill>
+              </a:rPr>
+              <a:t> generating songs in custom styles</a:t>
+            </a:r>
+          </a:p>
+        </p:txBody>
+      </p:sp>
+    </p:spTree>
+    <p:extLst>
+      <p:ext uri="{BB962C8B-B14F-4D97-AF65-F5344CB8AC3E}">
+        <p14:creationId xmlns:p14="http://schemas.microsoft.com/office/powerpoint/2010/main" val="2833844533"/>
+      </p:ext>
+    </p:extLst>
+  </p:cSld>
+  <p:clrMapOvr>
+    <a:masterClrMapping/>
+  </p:clrMapOvr>
+</p:sld>
+</file>
+
+<file path=ppt/slides/slide11.xml><?xml version="1.0" encoding="utf-8"?>
+<p:sld xmlns:a="http://schemas.openxmlformats.org/drawingml/2006/main" xmlns:r="http://schemas.openxmlformats.org/officeDocument/2006/relationships" xmlns:p="http://schemas.openxmlformats.org/presentationml/2006/main">
+  <p:cSld>
+    <p:spTree>
+      <p:nvGrpSpPr>
+        <p:cNvPr id="1" name="">
+          <a:extLst>
+            <a:ext uri="{FF2B5EF4-FFF2-40B4-BE49-F238E27FC236}">
               <a16:creationId xmlns:a16="http://schemas.microsoft.com/office/drawing/2014/main" id="{CF3E6E38-B71C-FD1A-02B5-63950E2BFC67}"/>
             </a:ext>
           </a:extLst>
@@ -5097,7 +5362,7 @@
 </p:sld>
 </file>
 
-<file path=ppt/slides/slide11.xml><?xml version="1.0" encoding="utf-8"?>
+<file path=ppt/slides/slide12.xml><?xml version="1.0" encoding="utf-8"?>
 <p:sld xmlns:a="http://schemas.openxmlformats.org/drawingml/2006/main" xmlns:r="http://schemas.openxmlformats.org/officeDocument/2006/relationships" xmlns:p="http://schemas.openxmlformats.org/presentationml/2006/main">
   <p:cSld>
     <p:spTree>
@@ -5316,7 +5581,7 @@
 </p:sld>
 </file>
 
-<file path=ppt/slides/slide12.xml><?xml version="1.0" encoding="utf-8"?>
+<file path=ppt/slides/slide13.xml><?xml version="1.0" encoding="utf-8"?>
 <p:sld xmlns:a="http://schemas.openxmlformats.org/drawingml/2006/main" xmlns:r="http://schemas.openxmlformats.org/officeDocument/2006/relationships" xmlns:p="http://schemas.openxmlformats.org/presentationml/2006/main">
   <p:cSld>
     <p:spTree>
@@ -5591,7 +5856,7 @@
 </p:sld>
 </file>
 
-<file path=ppt/slides/slide13.xml><?xml version="1.0" encoding="utf-8"?>
+<file path=ppt/slides/slide14.xml><?xml version="1.0" encoding="utf-8"?>
 <p:sld xmlns:a="http://schemas.openxmlformats.org/drawingml/2006/main" xmlns:r="http://schemas.openxmlformats.org/officeDocument/2006/relationships" xmlns:p="http://schemas.openxmlformats.org/presentationml/2006/main">
   <p:cSld>
     <p:spTree>
@@ -5835,7 +6100,7 @@
 </p:sld>
 </file>
 
-<file path=ppt/slides/slide14.xml><?xml version="1.0" encoding="utf-8"?>
+<file path=ppt/slides/slide15.xml><?xml version="1.0" encoding="utf-8"?>
 <p:sld xmlns:a="http://schemas.openxmlformats.org/drawingml/2006/main" xmlns:r="http://schemas.openxmlformats.org/officeDocument/2006/relationships" xmlns:p="http://schemas.openxmlformats.org/presentationml/2006/main">
   <p:cSld>
     <p:spTree>
@@ -6648,7 +6913,7 @@
 </p:sld>
 </file>
 
-<file path=ppt/slides/slide15.xml><?xml version="1.0" encoding="utf-8"?>
+<file path=ppt/slides/slide16.xml><?xml version="1.0" encoding="utf-8"?>
 <p:sld xmlns:a="http://schemas.openxmlformats.org/drawingml/2006/main" xmlns:r="http://schemas.openxmlformats.org/officeDocument/2006/relationships" xmlns:p="http://schemas.openxmlformats.org/presentationml/2006/main">
   <p:cSld>
     <p:spTree>
@@ -10107,7 +10372,7 @@
         <p:spPr>
           <a:xfrm>
             <a:off x="115824" y="1163659"/>
-            <a:ext cx="11960352" cy="4154984"/>
+            <a:ext cx="11960352" cy="4893647"/>
           </a:xfrm>
           <a:prstGeom prst="rect">
             <a:avLst/>
@@ -10338,6 +10603,53 @@
                 </a:solidFill>
               </a:rPr>
               <a:t>No learning. No adaptation. Just rules.</a:t>
+            </a:r>
+          </a:p>
+          <a:p>
+            <a:pPr lvl="0"/>
+            <a:endParaRPr lang="en-US" sz="2400" b="1" dirty="0">
+              <a:solidFill>
+                <a:schemeClr val="accent6">
+                  <a:lumMod val="60000"/>
+                  <a:lumOff val="40000"/>
+                </a:schemeClr>
+              </a:solidFill>
+            </a:endParaRPr>
+          </a:p>
+          <a:p>
+            <a:pPr lvl="0"/>
+            <a:r>
+              <a:rPr lang="en-US" sz="2400" dirty="0">
+                <a:solidFill>
+                  <a:schemeClr val="accent6">
+                    <a:lumMod val="60000"/>
+                    <a:lumOff val="40000"/>
+                  </a:schemeClr>
+                </a:solidFill>
+              </a:rPr>
+              <a:t>(Fraudster may change his </a:t>
+            </a:r>
+            <a:r>
+              <a:rPr lang="en-US" sz="2400" dirty="0" err="1">
+                <a:solidFill>
+                  <a:schemeClr val="accent6">
+                    <a:lumMod val="60000"/>
+                    <a:lumOff val="40000"/>
+                  </a:schemeClr>
+                </a:solidFill>
+              </a:rPr>
+              <a:t>behaviour</a:t>
+            </a:r>
+            <a:r>
+              <a:rPr lang="en-US" sz="2400" dirty="0">
+                <a:solidFill>
+                  <a:schemeClr val="accent6">
+                    <a:lumMod val="60000"/>
+                    <a:lumOff val="40000"/>
+                  </a:schemeClr>
+                </a:solidFill>
+              </a:rPr>
+              <a:t> and rule-based system would fail)</a:t>
             </a:r>
           </a:p>
         </p:txBody>
@@ -10393,7 +10705,7 @@
         <p:spPr>
           <a:xfrm>
             <a:off x="231648" y="1218523"/>
-            <a:ext cx="11960352" cy="5262979"/>
+            <a:ext cx="11960352" cy="1200329"/>
           </a:xfrm>
           <a:prstGeom prst="rect">
             <a:avLst/>
@@ -10482,193 +10794,243 @@
               <a:t> and I’ll figure it out.”</a:t>
             </a:r>
           </a:p>
-          <a:p>
-            <a:endParaRPr lang="en-US" sz="2400" dirty="0">
-              <a:solidFill>
-                <a:schemeClr val="accent6">
-                  <a:lumMod val="60000"/>
-                  <a:lumOff val="40000"/>
-                </a:schemeClr>
-              </a:solidFill>
-            </a:endParaRPr>
-          </a:p>
-          <a:p>
-            <a:r>
-              <a:rPr lang="en-US" sz="2400" dirty="0">
-                <a:solidFill>
-                  <a:schemeClr val="accent6">
-                    <a:lumMod val="60000"/>
-                    <a:lumOff val="40000"/>
-                  </a:schemeClr>
-                </a:solidFill>
-              </a:rPr>
-              <a:t> Algorithms began learning from </a:t>
-            </a:r>
-            <a:r>
-              <a:rPr lang="en-US" sz="2400" b="1" dirty="0">
-                <a:solidFill>
-                  <a:schemeClr val="accent6">
-                    <a:lumMod val="60000"/>
-                    <a:lumOff val="40000"/>
-                  </a:schemeClr>
-                </a:solidFill>
-              </a:rPr>
-              <a:t>patterns in data</a:t>
-            </a:r>
-            <a:r>
-              <a:rPr lang="en-US" sz="2400" dirty="0">
-                <a:solidFill>
-                  <a:schemeClr val="accent6">
-                    <a:lumMod val="60000"/>
-                    <a:lumOff val="40000"/>
-                  </a:schemeClr>
-                </a:solidFill>
-              </a:rPr>
-              <a:t>. This was aka as </a:t>
-            </a:r>
-            <a:r>
-              <a:rPr lang="en-US" sz="2400" b="1" dirty="0">
-                <a:solidFill>
-                  <a:schemeClr val="accent6">
-                    <a:lumMod val="60000"/>
-                    <a:lumOff val="40000"/>
-                  </a:schemeClr>
-                </a:solidFill>
-              </a:rPr>
-              <a:t>statistical learning</a:t>
-            </a:r>
-          </a:p>
-          <a:p>
-            <a:endParaRPr lang="en-US" sz="2400" b="1" dirty="0">
-              <a:solidFill>
-                <a:schemeClr val="accent6">
-                  <a:lumMod val="60000"/>
-                  <a:lumOff val="40000"/>
-                </a:schemeClr>
-              </a:solidFill>
-            </a:endParaRPr>
-          </a:p>
-          <a:p>
-            <a:r>
-              <a:rPr lang="en-IN" sz="2400" b="1" dirty="0">
-                <a:solidFill>
-                  <a:schemeClr val="accent6">
-                    <a:lumMod val="60000"/>
-                    <a:lumOff val="40000"/>
-                  </a:schemeClr>
-                </a:solidFill>
-              </a:rPr>
-              <a:t>Key Milestones:</a:t>
-            </a:r>
-            <a:endParaRPr lang="en-US" sz="2400" dirty="0">
-              <a:solidFill>
-                <a:schemeClr val="accent6">
-                  <a:lumMod val="60000"/>
-                  <a:lumOff val="40000"/>
-                </a:schemeClr>
-              </a:solidFill>
-            </a:endParaRPr>
-          </a:p>
-          <a:p>
-            <a:pPr lvl="0"/>
-            <a:r>
-              <a:rPr lang="en-IN" sz="2400" b="1" dirty="0">
-                <a:solidFill>
-                  <a:schemeClr val="accent6">
-                    <a:lumMod val="60000"/>
-                    <a:lumOff val="40000"/>
-                  </a:schemeClr>
-                </a:solidFill>
-              </a:rPr>
-              <a:t>1990s-2000s: </a:t>
-            </a:r>
-            <a:r>
-              <a:rPr lang="en-IN" sz="2400" dirty="0">
-                <a:solidFill>
-                  <a:schemeClr val="accent6">
-                    <a:lumMod val="60000"/>
-                    <a:lumOff val="40000"/>
-                  </a:schemeClr>
-                </a:solidFill>
-              </a:rPr>
-              <a:t>The development of more advanced ML algorithms, including support vector machines and decision trees.</a:t>
-            </a:r>
-          </a:p>
-          <a:p>
-            <a:pPr lvl="0"/>
-            <a:endParaRPr lang="en-US" sz="2400" b="1" dirty="0">
-              <a:solidFill>
-                <a:schemeClr val="accent6">
-                  <a:lumMod val="60000"/>
-                  <a:lumOff val="40000"/>
-                </a:schemeClr>
-              </a:solidFill>
-            </a:endParaRPr>
-          </a:p>
-          <a:p>
-            <a:r>
-              <a:rPr lang="en-US" sz="2400" b="1" dirty="0">
-                <a:solidFill>
-                  <a:schemeClr val="accent6">
-                    <a:lumMod val="60000"/>
-                    <a:lumOff val="40000"/>
-                  </a:schemeClr>
-                </a:solidFill>
-              </a:rPr>
-              <a:t>Example:</a:t>
-            </a:r>
-            <a:endParaRPr lang="en-US" sz="2400" dirty="0">
-              <a:solidFill>
-                <a:schemeClr val="accent6">
-                  <a:lumMod val="60000"/>
-                  <a:lumOff val="40000"/>
-                </a:schemeClr>
-              </a:solidFill>
-            </a:endParaRPr>
-          </a:p>
-          <a:p>
-            <a:pPr marL="342900" lvl="0" indent="-342900">
-              <a:buFont typeface="Arial" panose="020B0604020202020204" pitchFamily="34" charset="0"/>
-              <a:buChar char="•"/>
-            </a:pPr>
-            <a:r>
-              <a:rPr lang="en-US" sz="2400" dirty="0">
-                <a:solidFill>
-                  <a:schemeClr val="accent6">
-                    <a:lumMod val="60000"/>
-                    <a:lumOff val="40000"/>
-                  </a:schemeClr>
-                </a:solidFill>
-              </a:rPr>
-              <a:t>Spam filters that learn to block new types of spam based on examples.</a:t>
-            </a:r>
-          </a:p>
-          <a:p>
-            <a:pPr marL="342900" lvl="0" indent="-342900">
-              <a:buFont typeface="Arial" panose="020B0604020202020204" pitchFamily="34" charset="0"/>
-              <a:buChar char="•"/>
-            </a:pPr>
-            <a:r>
-              <a:rPr lang="en-US" sz="2400" dirty="0">
-                <a:solidFill>
-                  <a:schemeClr val="accent6">
-                    <a:lumMod val="60000"/>
-                    <a:lumOff val="40000"/>
-                  </a:schemeClr>
-                </a:solidFill>
-              </a:rPr>
-              <a:t>Recommendation systems (like Amazon and Netflix)</a:t>
-            </a:r>
-          </a:p>
-          <a:p>
-            <a:endParaRPr lang="en-US" sz="2400" dirty="0">
-              <a:solidFill>
-                <a:schemeClr val="accent6">
-                  <a:lumMod val="60000"/>
-                  <a:lumOff val="40000"/>
-                </a:schemeClr>
-              </a:solidFill>
-            </a:endParaRPr>
+        </p:txBody>
+      </p:sp>
+      <p:sp>
+        <p:nvSpPr>
+          <p:cNvPr id="2" name="Rectangle 1">
+            <a:extLst>
+              <a:ext uri="{FF2B5EF4-FFF2-40B4-BE49-F238E27FC236}">
+                <a16:creationId xmlns:a16="http://schemas.microsoft.com/office/drawing/2014/main" id="{54A31017-17D8-0F62-C187-91A265DD3A74}"/>
+              </a:ext>
+            </a:extLst>
+          </p:cNvPr>
+          <p:cNvSpPr/>
+          <p:nvPr/>
+        </p:nvSpPr>
+        <p:spPr>
+          <a:xfrm>
+            <a:off x="3886200" y="2798064"/>
+            <a:ext cx="3355848" cy="1563624"/>
+          </a:xfrm>
+          <a:prstGeom prst="rect">
+            <a:avLst/>
+          </a:prstGeom>
+        </p:spPr>
+        <p:style>
+          <a:lnRef idx="2">
+            <a:schemeClr val="accent1">
+              <a:shade val="15000"/>
+            </a:schemeClr>
+          </a:lnRef>
+          <a:fillRef idx="1">
+            <a:schemeClr val="accent1"/>
+          </a:fillRef>
+          <a:effectRef idx="0">
+            <a:schemeClr val="accent1"/>
+          </a:effectRef>
+          <a:fontRef idx="minor">
+            <a:schemeClr val="lt1"/>
+          </a:fontRef>
+        </p:style>
+        <p:txBody>
+          <a:bodyPr rtlCol="0" anchor="ctr"/>
+          <a:lstStyle/>
+          <a:p>
+            <a:pPr algn="ctr"/>
+            <a:r>
+              <a:rPr lang="en-US" sz="2800" dirty="0"/>
+              <a:t>Machine Learning  Model</a:t>
+            </a:r>
+          </a:p>
+        </p:txBody>
+      </p:sp>
+      <p:sp>
+        <p:nvSpPr>
+          <p:cNvPr id="4" name="Arrow: Right 3">
+            <a:extLst>
+              <a:ext uri="{FF2B5EF4-FFF2-40B4-BE49-F238E27FC236}">
+                <a16:creationId xmlns:a16="http://schemas.microsoft.com/office/drawing/2014/main" id="{DC69FD20-5CE5-210B-F02A-0C10D2124545}"/>
+              </a:ext>
+            </a:extLst>
+          </p:cNvPr>
+          <p:cNvSpPr/>
+          <p:nvPr/>
+        </p:nvSpPr>
+        <p:spPr>
+          <a:xfrm>
+            <a:off x="2807208" y="3191256"/>
+            <a:ext cx="978408" cy="694944"/>
+          </a:xfrm>
+          <a:prstGeom prst="rightArrow">
+            <a:avLst/>
+          </a:prstGeom>
+        </p:spPr>
+        <p:style>
+          <a:lnRef idx="2">
+            <a:schemeClr val="accent1">
+              <a:shade val="15000"/>
+            </a:schemeClr>
+          </a:lnRef>
+          <a:fillRef idx="1">
+            <a:schemeClr val="accent1"/>
+          </a:fillRef>
+          <a:effectRef idx="0">
+            <a:schemeClr val="accent1"/>
+          </a:effectRef>
+          <a:fontRef idx="minor">
+            <a:schemeClr val="lt1"/>
+          </a:fontRef>
+        </p:style>
+        <p:txBody>
+          <a:bodyPr rtlCol="0" anchor="ctr"/>
+          <a:lstStyle/>
+          <a:p>
+            <a:pPr algn="ctr"/>
+            <a:endParaRPr lang="en-US" dirty="0"/>
+          </a:p>
+        </p:txBody>
+      </p:sp>
+      <p:sp>
+        <p:nvSpPr>
+          <p:cNvPr id="6" name="Arrow: Right 5">
+            <a:extLst>
+              <a:ext uri="{FF2B5EF4-FFF2-40B4-BE49-F238E27FC236}">
+                <a16:creationId xmlns:a16="http://schemas.microsoft.com/office/drawing/2014/main" id="{C42F1BFC-1066-7628-30AF-E199E06196ED}"/>
+              </a:ext>
+            </a:extLst>
+          </p:cNvPr>
+          <p:cNvSpPr/>
+          <p:nvPr/>
+        </p:nvSpPr>
+        <p:spPr>
+          <a:xfrm>
+            <a:off x="7342632" y="3191256"/>
+            <a:ext cx="978408" cy="694944"/>
+          </a:xfrm>
+          <a:prstGeom prst="rightArrow">
+            <a:avLst/>
+          </a:prstGeom>
+        </p:spPr>
+        <p:style>
+          <a:lnRef idx="2">
+            <a:schemeClr val="accent1">
+              <a:shade val="15000"/>
+            </a:schemeClr>
+          </a:lnRef>
+          <a:fillRef idx="1">
+            <a:schemeClr val="accent1"/>
+          </a:fillRef>
+          <a:effectRef idx="0">
+            <a:schemeClr val="accent1"/>
+          </a:effectRef>
+          <a:fontRef idx="minor">
+            <a:schemeClr val="lt1"/>
+          </a:fontRef>
+        </p:style>
+        <p:txBody>
+          <a:bodyPr rtlCol="0" anchor="ctr"/>
+          <a:lstStyle/>
+          <a:p>
+            <a:pPr algn="ctr"/>
+            <a:endParaRPr lang="en-US"/>
+          </a:p>
+        </p:txBody>
+      </p:sp>
+      <p:sp>
+        <p:nvSpPr>
+          <p:cNvPr id="8" name="TextBox 7">
+            <a:extLst>
+              <a:ext uri="{FF2B5EF4-FFF2-40B4-BE49-F238E27FC236}">
+                <a16:creationId xmlns:a16="http://schemas.microsoft.com/office/drawing/2014/main" id="{7B958919-65E4-BC7E-1451-1AFCE511F210}"/>
+              </a:ext>
+            </a:extLst>
+          </p:cNvPr>
+          <p:cNvSpPr txBox="1"/>
+          <p:nvPr/>
+        </p:nvSpPr>
+        <p:spPr>
+          <a:xfrm>
+            <a:off x="1572768" y="3191256"/>
+            <a:ext cx="961353" cy="584775"/>
+          </a:xfrm>
+          <a:prstGeom prst="rect">
+            <a:avLst/>
+          </a:prstGeom>
+          <a:noFill/>
+        </p:spPr>
+        <p:txBody>
+          <a:bodyPr wrap="none" rtlCol="0">
+            <a:spAutoFit/>
+          </a:bodyPr>
+          <a:lstStyle/>
+          <a:p>
+            <a:r>
+              <a:rPr lang="en-US" sz="3200" dirty="0">
+                <a:solidFill>
+                  <a:schemeClr val="accent6">
+                    <a:lumMod val="60000"/>
+                    <a:lumOff val="40000"/>
+                  </a:schemeClr>
+                </a:solidFill>
+              </a:rPr>
+              <a:t>Data</a:t>
+            </a:r>
+          </a:p>
+        </p:txBody>
+      </p:sp>
+      <p:sp>
+        <p:nvSpPr>
+          <p:cNvPr id="10" name="TextBox 9">
+            <a:extLst>
+              <a:ext uri="{FF2B5EF4-FFF2-40B4-BE49-F238E27FC236}">
+                <a16:creationId xmlns:a16="http://schemas.microsoft.com/office/drawing/2014/main" id="{3EC89B6B-FF0F-A601-318A-4FA63FAD0B65}"/>
+              </a:ext>
+            </a:extLst>
+          </p:cNvPr>
+          <p:cNvSpPr txBox="1"/>
+          <p:nvPr/>
+        </p:nvSpPr>
+        <p:spPr>
+          <a:xfrm>
+            <a:off x="8421624" y="3191256"/>
+            <a:ext cx="1117614" cy="1077218"/>
+          </a:xfrm>
+          <a:prstGeom prst="rect">
+            <a:avLst/>
+          </a:prstGeom>
+          <a:noFill/>
+        </p:spPr>
+        <p:txBody>
+          <a:bodyPr wrap="none" rtlCol="0">
+            <a:spAutoFit/>
+          </a:bodyPr>
+          <a:lstStyle/>
+          <a:p>
+            <a:r>
+              <a:rPr lang="en-US" sz="3200" dirty="0">
+                <a:solidFill>
+                  <a:schemeClr val="accent6">
+                    <a:lumMod val="60000"/>
+                    <a:lumOff val="40000"/>
+                  </a:schemeClr>
+                </a:solidFill>
+              </a:rPr>
+              <a:t>Learn</a:t>
+            </a:r>
+          </a:p>
+          <a:p>
+            <a:r>
+              <a:rPr lang="en-US" sz="3200" dirty="0">
+                <a:solidFill>
+                  <a:schemeClr val="accent6">
+                    <a:lumMod val="60000"/>
+                    <a:lumOff val="40000"/>
+                  </a:schemeClr>
+                </a:solidFill>
+              </a:rPr>
+              <a:t>Rules</a:t>
+            </a:r>
           </a:p>
         </p:txBody>
       </p:sp>
@@ -10686,6 +11048,249 @@
 </file>
 
 <file path=ppt/slides/slide8.xml><?xml version="1.0" encoding="utf-8"?>
+<p:sld xmlns:a="http://schemas.openxmlformats.org/drawingml/2006/main" xmlns:r="http://schemas.openxmlformats.org/officeDocument/2006/relationships" xmlns:p="http://schemas.openxmlformats.org/presentationml/2006/main">
+  <p:cSld>
+    <p:spTree>
+      <p:nvGrpSpPr>
+        <p:cNvPr id="1" name="">
+          <a:extLst>
+            <a:ext uri="{FF2B5EF4-FFF2-40B4-BE49-F238E27FC236}">
+              <a16:creationId xmlns:a16="http://schemas.microsoft.com/office/drawing/2014/main" id="{A52A2C03-1DB4-5344-2E01-4E28EF9F9B76}"/>
+            </a:ext>
+          </a:extLst>
+        </p:cNvPr>
+        <p:cNvGrpSpPr/>
+        <p:nvPr/>
+      </p:nvGrpSpPr>
+      <p:grpSpPr>
+        <a:xfrm>
+          <a:off x="0" y="0"/>
+          <a:ext cx="0" cy="0"/>
+          <a:chOff x="0" y="0"/>
+          <a:chExt cx="0" cy="0"/>
+        </a:xfrm>
+      </p:grpSpPr>
+      <p:sp>
+        <p:nvSpPr>
+          <p:cNvPr id="3" name="TextBox 2">
+            <a:extLst>
+              <a:ext uri="{FF2B5EF4-FFF2-40B4-BE49-F238E27FC236}">
+                <a16:creationId xmlns:a16="http://schemas.microsoft.com/office/drawing/2014/main" id="{CB751F81-4F85-513D-3323-4DD82EA1110E}"/>
+              </a:ext>
+            </a:extLst>
+          </p:cNvPr>
+          <p:cNvSpPr txBox="1"/>
+          <p:nvPr/>
+        </p:nvSpPr>
+        <p:spPr>
+          <a:xfrm>
+            <a:off x="231648" y="1218523"/>
+            <a:ext cx="11960352" cy="3785652"/>
+          </a:xfrm>
+          <a:prstGeom prst="rect">
+            <a:avLst/>
+          </a:prstGeom>
+          <a:noFill/>
+        </p:spPr>
+        <p:txBody>
+          <a:bodyPr wrap="square">
+            <a:spAutoFit/>
+          </a:bodyPr>
+          <a:lstStyle/>
+          <a:p>
+            <a:r>
+              <a:rPr lang="en-US" sz="2400" dirty="0">
+                <a:solidFill>
+                  <a:schemeClr val="accent6">
+                    <a:lumMod val="60000"/>
+                    <a:lumOff val="40000"/>
+                  </a:schemeClr>
+                </a:solidFill>
+              </a:rPr>
+              <a:t>Algorithms began learning from </a:t>
+            </a:r>
+            <a:r>
+              <a:rPr lang="en-US" sz="2400" b="1" dirty="0">
+                <a:solidFill>
+                  <a:schemeClr val="accent6">
+                    <a:lumMod val="60000"/>
+                    <a:lumOff val="40000"/>
+                  </a:schemeClr>
+                </a:solidFill>
+              </a:rPr>
+              <a:t>patterns in data</a:t>
+            </a:r>
+            <a:r>
+              <a:rPr lang="en-US" sz="2400" dirty="0">
+                <a:solidFill>
+                  <a:schemeClr val="accent6">
+                    <a:lumMod val="60000"/>
+                    <a:lumOff val="40000"/>
+                  </a:schemeClr>
+                </a:solidFill>
+              </a:rPr>
+              <a:t>. This was aka as </a:t>
+            </a:r>
+            <a:r>
+              <a:rPr lang="en-US" sz="2400" b="1" dirty="0">
+                <a:solidFill>
+                  <a:schemeClr val="accent6">
+                    <a:lumMod val="60000"/>
+                    <a:lumOff val="40000"/>
+                  </a:schemeClr>
+                </a:solidFill>
+              </a:rPr>
+              <a:t>statistical learning</a:t>
+            </a:r>
+          </a:p>
+          <a:p>
+            <a:endParaRPr lang="en-US" sz="2400" b="1" dirty="0">
+              <a:solidFill>
+                <a:schemeClr val="accent6">
+                  <a:lumMod val="60000"/>
+                  <a:lumOff val="40000"/>
+                </a:schemeClr>
+              </a:solidFill>
+            </a:endParaRPr>
+          </a:p>
+          <a:p>
+            <a:r>
+              <a:rPr lang="en-IN" sz="2400" b="1" dirty="0">
+                <a:solidFill>
+                  <a:schemeClr val="accent6">
+                    <a:lumMod val="60000"/>
+                    <a:lumOff val="40000"/>
+                  </a:schemeClr>
+                </a:solidFill>
+              </a:rPr>
+              <a:t>Key Milestones:</a:t>
+            </a:r>
+            <a:endParaRPr lang="en-US" sz="2400" dirty="0">
+              <a:solidFill>
+                <a:schemeClr val="accent6">
+                  <a:lumMod val="60000"/>
+                  <a:lumOff val="40000"/>
+                </a:schemeClr>
+              </a:solidFill>
+            </a:endParaRPr>
+          </a:p>
+          <a:p>
+            <a:pPr lvl="0"/>
+            <a:r>
+              <a:rPr lang="en-IN" sz="2400" b="1" dirty="0">
+                <a:solidFill>
+                  <a:schemeClr val="accent6">
+                    <a:lumMod val="60000"/>
+                    <a:lumOff val="40000"/>
+                  </a:schemeClr>
+                </a:solidFill>
+              </a:rPr>
+              <a:t>1990s-2000s: </a:t>
+            </a:r>
+            <a:r>
+              <a:rPr lang="en-IN" sz="2400" dirty="0">
+                <a:solidFill>
+                  <a:schemeClr val="accent6">
+                    <a:lumMod val="60000"/>
+                    <a:lumOff val="40000"/>
+                  </a:schemeClr>
+                </a:solidFill>
+              </a:rPr>
+              <a:t>The development of more advanced ML algorithms, including support vector machines and decision trees.</a:t>
+            </a:r>
+          </a:p>
+          <a:p>
+            <a:pPr lvl="0"/>
+            <a:endParaRPr lang="en-US" sz="2400" b="1" dirty="0">
+              <a:solidFill>
+                <a:schemeClr val="accent6">
+                  <a:lumMod val="60000"/>
+                  <a:lumOff val="40000"/>
+                </a:schemeClr>
+              </a:solidFill>
+            </a:endParaRPr>
+          </a:p>
+          <a:p>
+            <a:r>
+              <a:rPr lang="en-US" sz="2400" b="1" dirty="0">
+                <a:solidFill>
+                  <a:schemeClr val="accent6">
+                    <a:lumMod val="60000"/>
+                    <a:lumOff val="40000"/>
+                  </a:schemeClr>
+                </a:solidFill>
+              </a:rPr>
+              <a:t>Example:</a:t>
+            </a:r>
+            <a:endParaRPr lang="en-US" sz="2400" dirty="0">
+              <a:solidFill>
+                <a:schemeClr val="accent6">
+                  <a:lumMod val="60000"/>
+                  <a:lumOff val="40000"/>
+                </a:schemeClr>
+              </a:solidFill>
+            </a:endParaRPr>
+          </a:p>
+          <a:p>
+            <a:pPr marL="342900" lvl="0" indent="-342900">
+              <a:buFont typeface="Arial" panose="020B0604020202020204" pitchFamily="34" charset="0"/>
+              <a:buChar char="•"/>
+            </a:pPr>
+            <a:r>
+              <a:rPr lang="en-US" sz="2400" dirty="0">
+                <a:solidFill>
+                  <a:schemeClr val="accent6">
+                    <a:lumMod val="60000"/>
+                    <a:lumOff val="40000"/>
+                  </a:schemeClr>
+                </a:solidFill>
+              </a:rPr>
+              <a:t>Spam filters that learn to block new types of spam based on examples.</a:t>
+            </a:r>
+          </a:p>
+          <a:p>
+            <a:pPr marL="342900" lvl="0" indent="-342900">
+              <a:buFont typeface="Arial" panose="020B0604020202020204" pitchFamily="34" charset="0"/>
+              <a:buChar char="•"/>
+            </a:pPr>
+            <a:r>
+              <a:rPr lang="en-US" sz="2400" dirty="0">
+                <a:solidFill>
+                  <a:schemeClr val="accent6">
+                    <a:lumMod val="60000"/>
+                    <a:lumOff val="40000"/>
+                  </a:schemeClr>
+                </a:solidFill>
+              </a:rPr>
+              <a:t>Recommendation systems (like Amazon and Netflix)</a:t>
+            </a:r>
+          </a:p>
+          <a:p>
+            <a:endParaRPr lang="en-US" sz="2400" dirty="0">
+              <a:solidFill>
+                <a:schemeClr val="accent6">
+                  <a:lumMod val="60000"/>
+                  <a:lumOff val="40000"/>
+                </a:schemeClr>
+              </a:solidFill>
+            </a:endParaRPr>
+          </a:p>
+        </p:txBody>
+      </p:sp>
+    </p:spTree>
+    <p:extLst>
+      <p:ext uri="{BB962C8B-B14F-4D97-AF65-F5344CB8AC3E}">
+        <p14:creationId xmlns:p14="http://schemas.microsoft.com/office/powerpoint/2010/main" val="1319207303"/>
+      </p:ext>
+    </p:extLst>
+  </p:cSld>
+  <p:clrMapOvr>
+    <a:masterClrMapping/>
+  </p:clrMapOvr>
+</p:sld>
+</file>
+
+<file path=ppt/slides/slide9.xml><?xml version="1.0" encoding="utf-8"?>
 <p:sld xmlns:a="http://schemas.openxmlformats.org/drawingml/2006/main" xmlns:r="http://schemas.openxmlformats.org/officeDocument/2006/relationships" xmlns:p="http://schemas.openxmlformats.org/presentationml/2006/main">
   <p:cSld>
     <p:spTree>
@@ -10723,7 +11328,7 @@
         <p:spPr>
           <a:xfrm>
             <a:off x="115824" y="1166842"/>
-            <a:ext cx="11960352" cy="4524315"/>
+            <a:ext cx="11960352" cy="4893647"/>
           </a:xfrm>
           <a:prstGeom prst="rect">
             <a:avLst/>
@@ -10958,27 +11563,25 @@
                   </a:schemeClr>
                 </a:solidFill>
               </a:rPr>
-              <a:t>Real-time </a:t>
-            </a:r>
-            <a:r>
-              <a:rPr lang="en-US" sz="2400" dirty="0" err="1">
-                <a:solidFill>
-                  <a:schemeClr val="accent6">
-                    <a:lumMod val="60000"/>
-                    <a:lumOff val="40000"/>
-                  </a:schemeClr>
-                </a:solidFill>
-              </a:rPr>
-              <a:t>languag</a:t>
-            </a:r>
-            <a:endParaRPr lang="en-US" sz="2400" dirty="0">
-              <a:solidFill>
-                <a:schemeClr val="accent6">
-                  <a:lumMod val="60000"/>
-                  <a:lumOff val="40000"/>
-                </a:schemeClr>
-              </a:solidFill>
-            </a:endParaRPr>
+              <a:t>Real-time language </a:t>
+            </a:r>
+          </a:p>
+          <a:p>
+            <a:pPr marL="342900" lvl="0" indent="-342900">
+              <a:buFont typeface="Arial" panose="020B0604020202020204" pitchFamily="34" charset="0"/>
+              <a:buChar char="•"/>
+            </a:pPr>
+            <a:r>
+              <a:rPr lang="en-US" sz="2400" dirty="0">
+                <a:solidFill>
+                  <a:schemeClr val="accent6">
+                    <a:lumMod val="60000"/>
+                    <a:lumOff val="40000"/>
+                  </a:schemeClr>
+                </a:solidFill>
+              </a:rPr>
+              <a:t>Speech to Text</a:t>
+            </a:r>
           </a:p>
         </p:txBody>
       </p:sp>
@@ -10986,270 +11589,6 @@
     <p:extLst>
       <p:ext uri="{BB962C8B-B14F-4D97-AF65-F5344CB8AC3E}">
         <p14:creationId xmlns:p14="http://schemas.microsoft.com/office/powerpoint/2010/main" val="1236499018"/>
-      </p:ext>
-    </p:extLst>
-  </p:cSld>
-  <p:clrMapOvr>
-    <a:masterClrMapping/>
-  </p:clrMapOvr>
-</p:sld>
-</file>
-
-<file path=ppt/slides/slide9.xml><?xml version="1.0" encoding="utf-8"?>
-<p:sld xmlns:a="http://schemas.openxmlformats.org/drawingml/2006/main" xmlns:r="http://schemas.openxmlformats.org/officeDocument/2006/relationships" xmlns:p="http://schemas.openxmlformats.org/presentationml/2006/main">
-  <p:cSld>
-    <p:spTree>
-      <p:nvGrpSpPr>
-        <p:cNvPr id="1" name="">
-          <a:extLst>
-            <a:ext uri="{FF2B5EF4-FFF2-40B4-BE49-F238E27FC236}">
-              <a16:creationId xmlns:a16="http://schemas.microsoft.com/office/drawing/2014/main" id="{39D7987C-E997-B003-4F1A-0C0C8FBA1DC6}"/>
-            </a:ext>
-          </a:extLst>
-        </p:cNvPr>
-        <p:cNvGrpSpPr/>
-        <p:nvPr/>
-      </p:nvGrpSpPr>
-      <p:grpSpPr>
-        <a:xfrm>
-          <a:off x="0" y="0"/>
-          <a:ext cx="0" cy="0"/>
-          <a:chOff x="0" y="0"/>
-          <a:chExt cx="0" cy="0"/>
-        </a:xfrm>
-      </p:grpSpPr>
-      <p:sp>
-        <p:nvSpPr>
-          <p:cNvPr id="3" name="TextBox 2">
-            <a:extLst>
-              <a:ext uri="{FF2B5EF4-FFF2-40B4-BE49-F238E27FC236}">
-                <a16:creationId xmlns:a16="http://schemas.microsoft.com/office/drawing/2014/main" id="{40BC7108-C77B-96A6-B0A4-665394E2C08F}"/>
-              </a:ext>
-            </a:extLst>
-          </p:cNvPr>
-          <p:cNvSpPr txBox="1"/>
-          <p:nvPr/>
-        </p:nvSpPr>
-        <p:spPr>
-          <a:xfrm>
-            <a:off x="128016" y="230971"/>
-            <a:ext cx="11960352" cy="3785652"/>
-          </a:xfrm>
-          <a:prstGeom prst="rect">
-            <a:avLst/>
-          </a:prstGeom>
-          <a:noFill/>
-        </p:spPr>
-        <p:txBody>
-          <a:bodyPr wrap="square">
-            <a:spAutoFit/>
-          </a:bodyPr>
-          <a:lstStyle/>
-          <a:p>
-            <a:r>
-              <a:rPr lang="en-US" sz="2400" b="1" dirty="0">
-                <a:solidFill>
-                  <a:schemeClr val="accent6">
-                    <a:lumMod val="60000"/>
-                    <a:lumOff val="40000"/>
-                  </a:schemeClr>
-                </a:solidFill>
-              </a:rPr>
-              <a:t>4️. Generative AI  (2020s–Future) </a:t>
-            </a:r>
-          </a:p>
-          <a:p>
-            <a:endParaRPr lang="en-US" sz="2400" dirty="0">
-              <a:solidFill>
-                <a:schemeClr val="accent6">
-                  <a:lumMod val="60000"/>
-                  <a:lumOff val="40000"/>
-                </a:schemeClr>
-              </a:solidFill>
-            </a:endParaRPr>
-          </a:p>
-          <a:p>
-            <a:r>
-              <a:rPr lang="en-US" sz="2400" dirty="0">
-                <a:solidFill>
-                  <a:schemeClr val="accent6">
-                    <a:lumMod val="60000"/>
-                    <a:lumOff val="40000"/>
-                  </a:schemeClr>
-                </a:solidFill>
-              </a:rPr>
-              <a:t>“Now I can </a:t>
-            </a:r>
-            <a:r>
-              <a:rPr lang="en-US" sz="2400" b="1" dirty="0">
-                <a:solidFill>
-                  <a:schemeClr val="accent6">
-                    <a:lumMod val="60000"/>
-                    <a:lumOff val="40000"/>
-                  </a:schemeClr>
-                </a:solidFill>
-              </a:rPr>
-              <a:t>learn, imagine, write, and make up </a:t>
-            </a:r>
-            <a:r>
-              <a:rPr lang="en-US" sz="2400" dirty="0">
-                <a:solidFill>
-                  <a:schemeClr val="accent6">
-                    <a:lumMod val="60000"/>
-                    <a:lumOff val="40000"/>
-                  </a:schemeClr>
-                </a:solidFill>
-              </a:rPr>
-              <a:t>new things.”</a:t>
-            </a:r>
-          </a:p>
-          <a:p>
-            <a:endParaRPr lang="en-US" sz="2400" dirty="0">
-              <a:solidFill>
-                <a:schemeClr val="accent6">
-                  <a:lumMod val="60000"/>
-                  <a:lumOff val="40000"/>
-                </a:schemeClr>
-              </a:solidFill>
-            </a:endParaRPr>
-          </a:p>
-          <a:p>
-            <a:r>
-              <a:rPr lang="en-US" sz="2400" dirty="0">
-                <a:solidFill>
-                  <a:schemeClr val="accent6">
-                    <a:lumMod val="60000"/>
-                    <a:lumOff val="40000"/>
-                  </a:schemeClr>
-                </a:solidFill>
-              </a:rPr>
-              <a:t>These models generate brand new content: text, art, code, music—even </a:t>
-            </a:r>
-            <a:r>
-              <a:rPr lang="en-US" sz="2400" b="1" dirty="0">
-                <a:solidFill>
-                  <a:schemeClr val="accent6">
-                    <a:lumMod val="60000"/>
-                    <a:lumOff val="40000"/>
-                  </a:schemeClr>
-                </a:solidFill>
-              </a:rPr>
-              <a:t>deepfakes</a:t>
-            </a:r>
-            <a:r>
-              <a:rPr lang="en-US" sz="2400" dirty="0">
-                <a:solidFill>
-                  <a:schemeClr val="accent6">
-                    <a:lumMod val="60000"/>
-                    <a:lumOff val="40000"/>
-                  </a:schemeClr>
-                </a:solidFill>
-              </a:rPr>
-              <a:t>.</a:t>
-            </a:r>
-          </a:p>
-          <a:p>
-            <a:r>
-              <a:rPr lang="en-US" sz="2400" dirty="0">
-                <a:solidFill>
-                  <a:schemeClr val="accent6">
-                    <a:lumMod val="60000"/>
-                    <a:lumOff val="40000"/>
-                  </a:schemeClr>
-                </a:solidFill>
-              </a:rPr>
-              <a:t> </a:t>
-            </a:r>
-          </a:p>
-          <a:p>
-            <a:r>
-              <a:rPr lang="en-US" sz="2400" b="1" dirty="0">
-                <a:solidFill>
-                  <a:schemeClr val="accent6">
-                    <a:lumMod val="60000"/>
-                    <a:lumOff val="40000"/>
-                  </a:schemeClr>
-                </a:solidFill>
-              </a:rPr>
-              <a:t>Example:</a:t>
-            </a:r>
-            <a:endParaRPr lang="en-US" sz="2400" dirty="0">
-              <a:solidFill>
-                <a:schemeClr val="accent6">
-                  <a:lumMod val="60000"/>
-                  <a:lumOff val="40000"/>
-                </a:schemeClr>
-              </a:solidFill>
-            </a:endParaRPr>
-          </a:p>
-          <a:p>
-            <a:pPr marL="342900" lvl="0" indent="-342900">
-              <a:buFont typeface="Arial" panose="020B0604020202020204" pitchFamily="34" charset="0"/>
-              <a:buChar char="•"/>
-            </a:pPr>
-            <a:r>
-              <a:rPr lang="en-US" sz="2400" dirty="0">
-                <a:solidFill>
-                  <a:schemeClr val="accent6">
-                    <a:lumMod val="60000"/>
-                    <a:lumOff val="40000"/>
-                  </a:schemeClr>
-                </a:solidFill>
-              </a:rPr>
-              <a:t>ChatGPT writing stories</a:t>
-            </a:r>
-          </a:p>
-          <a:p>
-            <a:pPr marL="342900" lvl="0" indent="-342900">
-              <a:buFont typeface="Arial" panose="020B0604020202020204" pitchFamily="34" charset="0"/>
-              <a:buChar char="•"/>
-            </a:pPr>
-            <a:r>
-              <a:rPr lang="en-US" sz="2400" dirty="0">
-                <a:solidFill>
-                  <a:schemeClr val="accent6">
-                    <a:lumMod val="60000"/>
-                    <a:lumOff val="40000"/>
-                  </a:schemeClr>
-                </a:solidFill>
-              </a:rPr>
-              <a:t>DALL·E creating images from words</a:t>
-            </a:r>
-          </a:p>
-          <a:p>
-            <a:pPr marL="342900" lvl="0" indent="-342900">
-              <a:buFont typeface="Arial" panose="020B0604020202020204" pitchFamily="34" charset="0"/>
-              <a:buChar char="•"/>
-            </a:pPr>
-            <a:r>
-              <a:rPr lang="en-US" sz="2400" dirty="0" err="1">
-                <a:solidFill>
-                  <a:schemeClr val="accent6">
-                    <a:lumMod val="60000"/>
-                    <a:lumOff val="40000"/>
-                  </a:schemeClr>
-                </a:solidFill>
-              </a:rPr>
-              <a:t>MusicLM</a:t>
-            </a:r>
-            <a:r>
-              <a:rPr lang="en-US" sz="2400" dirty="0">
-                <a:solidFill>
-                  <a:schemeClr val="accent6">
-                    <a:lumMod val="60000"/>
-                    <a:lumOff val="40000"/>
-                  </a:schemeClr>
-                </a:solidFill>
-              </a:rPr>
-              <a:t> generating songs in custom styles</a:t>
-            </a:r>
-          </a:p>
-        </p:txBody>
-      </p:sp>
-    </p:spTree>
-    <p:extLst>
-      <p:ext uri="{BB962C8B-B14F-4D97-AF65-F5344CB8AC3E}">
-        <p14:creationId xmlns:p14="http://schemas.microsoft.com/office/powerpoint/2010/main" val="2833844533"/>
       </p:ext>
     </p:extLst>
   </p:cSld>
